--- a/docs/lecture_slides/Week 1/Week1_Lecture2_Slides_1_12_2024.pptx
+++ b/docs/lecture_slides/Week 1/Week1_Lecture2_Slides_1_12_2024.pptx
@@ -14,11 +14,11 @@
     <p:sldId id="272" r:id="rId8"/>
     <p:sldId id="285" r:id="rId9"/>
     <p:sldId id="283" r:id="rId10"/>
-    <p:sldId id="277" r:id="rId11"/>
-    <p:sldId id="287" r:id="rId12"/>
-    <p:sldId id="286" r:id="rId13"/>
-    <p:sldId id="273" r:id="rId14"/>
-    <p:sldId id="288" r:id="rId15"/>
+    <p:sldId id="286" r:id="rId11"/>
+    <p:sldId id="273" r:id="rId12"/>
+    <p:sldId id="288" r:id="rId13"/>
+    <p:sldId id="277" r:id="rId14"/>
+    <p:sldId id="287" r:id="rId15"/>
     <p:sldId id="282" r:id="rId16"/>
     <p:sldId id="279" r:id="rId17"/>
     <p:sldId id="280" r:id="rId18"/>
@@ -6617,7 +6617,7 @@
           <a:p>
             <a:fld id="{06882561-BD16-4A95-ACA1-5204E478F2FE}" type="datetimeFigureOut">
               <a:rPr lang="en-US" smtClean="0"/>
-              <a:t>8/23/2023</a:t>
+              <a:t>1/16/2024</a:t>
             </a:fld>
             <a:endParaRPr lang="en-US"/>
           </a:p>
@@ -6815,7 +6815,7 @@
           <a:p>
             <a:fld id="{06882561-BD16-4A95-ACA1-5204E478F2FE}" type="datetimeFigureOut">
               <a:rPr lang="en-US" smtClean="0"/>
-              <a:t>8/23/2023</a:t>
+              <a:t>1/16/2024</a:t>
             </a:fld>
             <a:endParaRPr lang="en-US"/>
           </a:p>
@@ -7023,7 +7023,7 @@
           <a:p>
             <a:fld id="{06882561-BD16-4A95-ACA1-5204E478F2FE}" type="datetimeFigureOut">
               <a:rPr lang="en-US" smtClean="0"/>
-              <a:t>8/23/2023</a:t>
+              <a:t>1/16/2024</a:t>
             </a:fld>
             <a:endParaRPr lang="en-US"/>
           </a:p>
@@ -7221,7 +7221,7 @@
           <a:p>
             <a:fld id="{06882561-BD16-4A95-ACA1-5204E478F2FE}" type="datetimeFigureOut">
               <a:rPr lang="en-US" smtClean="0"/>
-              <a:t>8/23/2023</a:t>
+              <a:t>1/16/2024</a:t>
             </a:fld>
             <a:endParaRPr lang="en-US"/>
           </a:p>
@@ -7496,7 +7496,7 @@
           <a:p>
             <a:fld id="{06882561-BD16-4A95-ACA1-5204E478F2FE}" type="datetimeFigureOut">
               <a:rPr lang="en-US" smtClean="0"/>
-              <a:t>8/23/2023</a:t>
+              <a:t>1/16/2024</a:t>
             </a:fld>
             <a:endParaRPr lang="en-US"/>
           </a:p>
@@ -7761,7 +7761,7 @@
           <a:p>
             <a:fld id="{06882561-BD16-4A95-ACA1-5204E478F2FE}" type="datetimeFigureOut">
               <a:rPr lang="en-US" smtClean="0"/>
-              <a:t>8/23/2023</a:t>
+              <a:t>1/16/2024</a:t>
             </a:fld>
             <a:endParaRPr lang="en-US"/>
           </a:p>
@@ -8173,7 +8173,7 @@
           <a:p>
             <a:fld id="{06882561-BD16-4A95-ACA1-5204E478F2FE}" type="datetimeFigureOut">
               <a:rPr lang="en-US" smtClean="0"/>
-              <a:t>8/23/2023</a:t>
+              <a:t>1/16/2024</a:t>
             </a:fld>
             <a:endParaRPr lang="en-US"/>
           </a:p>
@@ -8314,7 +8314,7 @@
           <a:p>
             <a:fld id="{06882561-BD16-4A95-ACA1-5204E478F2FE}" type="datetimeFigureOut">
               <a:rPr lang="en-US" smtClean="0"/>
-              <a:t>8/23/2023</a:t>
+              <a:t>1/16/2024</a:t>
             </a:fld>
             <a:endParaRPr lang="en-US"/>
           </a:p>
@@ -8427,7 +8427,7 @@
           <a:p>
             <a:fld id="{06882561-BD16-4A95-ACA1-5204E478F2FE}" type="datetimeFigureOut">
               <a:rPr lang="en-US" smtClean="0"/>
-              <a:t>8/23/2023</a:t>
+              <a:t>1/16/2024</a:t>
             </a:fld>
             <a:endParaRPr lang="en-US"/>
           </a:p>
@@ -8738,7 +8738,7 @@
           <a:p>
             <a:fld id="{06882561-BD16-4A95-ACA1-5204E478F2FE}" type="datetimeFigureOut">
               <a:rPr lang="en-US" smtClean="0"/>
-              <a:t>8/23/2023</a:t>
+              <a:t>1/16/2024</a:t>
             </a:fld>
             <a:endParaRPr lang="en-US"/>
           </a:p>
@@ -9026,7 +9026,7 @@
           <a:p>
             <a:fld id="{06882561-BD16-4A95-ACA1-5204E478F2FE}" type="datetimeFigureOut">
               <a:rPr lang="en-US" smtClean="0"/>
-              <a:t>8/23/2023</a:t>
+              <a:t>1/16/2024</a:t>
             </a:fld>
             <a:endParaRPr lang="en-US"/>
           </a:p>
@@ -9267,7 +9267,7 @@
           <a:p>
             <a:fld id="{06882561-BD16-4A95-ACA1-5204E478F2FE}" type="datetimeFigureOut">
               <a:rPr lang="en-US" smtClean="0"/>
-              <a:t>8/23/2023</a:t>
+              <a:t>1/16/2024</a:t>
             </a:fld>
             <a:endParaRPr lang="en-US"/>
           </a:p>
@@ -9746,6 +9746,358 @@
 <file path=ppt/slides/slide10.xml><?xml version="1.0" encoding="utf-8"?>
 <p:sld xmlns:a="http://schemas.openxmlformats.org/drawingml/2006/main" xmlns:r="http://schemas.openxmlformats.org/officeDocument/2006/relationships" xmlns:p="http://schemas.openxmlformats.org/presentationml/2006/main">
   <p:cSld>
+    <p:spTree>
+      <p:nvGrpSpPr>
+        <p:cNvPr id="1" name=""/>
+        <p:cNvGrpSpPr/>
+        <p:nvPr/>
+      </p:nvGrpSpPr>
+      <p:grpSpPr>
+        <a:xfrm>
+          <a:off x="0" y="0"/>
+          <a:ext cx="0" cy="0"/>
+          <a:chOff x="0" y="0"/>
+          <a:chExt cx="0" cy="0"/>
+        </a:xfrm>
+      </p:grpSpPr>
+      <p:sp>
+        <p:nvSpPr>
+          <p:cNvPr id="2" name="Title 1">
+            <a:extLst>
+              <a:ext uri="{FF2B5EF4-FFF2-40B4-BE49-F238E27FC236}">
+                <a16:creationId xmlns:a16="http://schemas.microsoft.com/office/drawing/2014/main" id="{476194FF-DF74-EF86-DF92-8D34A4EA85C3}"/>
+              </a:ext>
+            </a:extLst>
+          </p:cNvPr>
+          <p:cNvSpPr>
+            <a:spLocks noGrp="1"/>
+          </p:cNvSpPr>
+          <p:nvPr>
+            <p:ph type="title"/>
+          </p:nvPr>
+        </p:nvSpPr>
+        <p:spPr/>
+        <p:txBody>
+          <a:bodyPr/>
+          <a:lstStyle/>
+          <a:p>
+            <a:r>
+              <a:rPr lang="en-US" dirty="0"/>
+              <a:t>Frequency Tables for Continuous Variables</a:t>
+            </a:r>
+          </a:p>
+        </p:txBody>
+      </p:sp>
+      <p:sp>
+        <p:nvSpPr>
+          <p:cNvPr id="3" name="Content Placeholder 2">
+            <a:extLst>
+              <a:ext uri="{FF2B5EF4-FFF2-40B4-BE49-F238E27FC236}">
+                <a16:creationId xmlns:a16="http://schemas.microsoft.com/office/drawing/2014/main" id="{B8E94895-622E-4F90-9B01-BC714AD08FD2}"/>
+              </a:ext>
+            </a:extLst>
+          </p:cNvPr>
+          <p:cNvSpPr>
+            <a:spLocks noGrp="1"/>
+          </p:cNvSpPr>
+          <p:nvPr>
+            <p:ph idx="1"/>
+          </p:nvPr>
+        </p:nvSpPr>
+        <p:spPr>
+          <a:xfrm>
+            <a:off x="838200" y="1825625"/>
+            <a:ext cx="10236200" cy="4351338"/>
+          </a:xfrm>
+        </p:spPr>
+        <p:txBody>
+          <a:bodyPr/>
+          <a:lstStyle/>
+          <a:p>
+            <a:r>
+              <a:rPr lang="en-US" dirty="0"/>
+              <a:t>The number of possible values is usually very large </a:t>
+            </a:r>
+          </a:p>
+          <a:p>
+            <a:r>
+              <a:rPr lang="en-US" dirty="0"/>
+              <a:t>Convert continuous values into discrete groups (sometimes called bins):</a:t>
+            </a:r>
+          </a:p>
+          <a:p>
+            <a:endParaRPr lang="en-US" dirty="0"/>
+          </a:p>
+          <a:p>
+            <a:pPr marL="0" indent="0">
+              <a:buNone/>
+            </a:pPr>
+            <a:r>
+              <a:rPr lang="en-US" b="1" dirty="0"/>
+              <a:t>Steps: </a:t>
+            </a:r>
+          </a:p>
+          <a:p>
+            <a:pPr marL="514350" indent="-514350">
+              <a:buFont typeface="+mj-lt"/>
+              <a:buAutoNum type="arabicPeriod"/>
+            </a:pPr>
+            <a:r>
+              <a:rPr lang="en-US" dirty="0"/>
+              <a:t>Divide the range of the variable into a set of non-overlapping intervals</a:t>
+            </a:r>
+          </a:p>
+          <a:p>
+            <a:pPr marL="514350" indent="-514350">
+              <a:buFont typeface="+mj-lt"/>
+              <a:buAutoNum type="arabicPeriod"/>
+            </a:pPr>
+            <a:r>
+              <a:rPr lang="en-US" dirty="0"/>
+              <a:t>Count the number of values that fall into each interval</a:t>
+            </a:r>
+          </a:p>
+        </p:txBody>
+      </p:sp>
+    </p:spTree>
+    <p:extLst>
+      <p:ext uri="{BB962C8B-B14F-4D97-AF65-F5344CB8AC3E}">
+        <p14:creationId xmlns:p14="http://schemas.microsoft.com/office/powerpoint/2010/main" val="967060633"/>
+      </p:ext>
+    </p:extLst>
+  </p:cSld>
+  <p:clrMapOvr>
+    <a:masterClrMapping/>
+  </p:clrMapOvr>
+</p:sld>
+</file>
+
+<file path=ppt/slides/slide11.xml><?xml version="1.0" encoding="utf-8"?>
+<p:sld xmlns:a="http://schemas.openxmlformats.org/drawingml/2006/main" xmlns:r="http://schemas.openxmlformats.org/officeDocument/2006/relationships" xmlns:p="http://schemas.openxmlformats.org/presentationml/2006/main">
+  <p:cSld>
+    <p:spTree>
+      <p:nvGrpSpPr>
+        <p:cNvPr id="1" name=""/>
+        <p:cNvGrpSpPr/>
+        <p:nvPr/>
+      </p:nvGrpSpPr>
+      <p:grpSpPr>
+        <a:xfrm>
+          <a:off x="0" y="0"/>
+          <a:ext cx="0" cy="0"/>
+          <a:chOff x="0" y="0"/>
+          <a:chExt cx="0" cy="0"/>
+        </a:xfrm>
+      </p:grpSpPr>
+      <p:sp>
+        <p:nvSpPr>
+          <p:cNvPr id="2" name="Title 1">
+            <a:extLst>
+              <a:ext uri="{FF2B5EF4-FFF2-40B4-BE49-F238E27FC236}">
+                <a16:creationId xmlns:a16="http://schemas.microsoft.com/office/drawing/2014/main" id="{A2418BEF-F19E-DBAD-FF9A-8FDF1FBD3654}"/>
+              </a:ext>
+            </a:extLst>
+          </p:cNvPr>
+          <p:cNvSpPr>
+            <a:spLocks noGrp="1"/>
+          </p:cNvSpPr>
+          <p:nvPr>
+            <p:ph type="title"/>
+          </p:nvPr>
+        </p:nvSpPr>
+        <p:spPr>
+          <a:xfrm>
+            <a:off x="838200" y="365126"/>
+            <a:ext cx="10515600" cy="825500"/>
+          </a:xfrm>
+        </p:spPr>
+        <p:txBody>
+          <a:bodyPr>
+            <a:normAutofit/>
+          </a:bodyPr>
+          <a:lstStyle/>
+          <a:p>
+            <a:r>
+              <a:rPr lang="en-US" sz="4000" dirty="0"/>
+              <a:t>Example: Old Faithful Eruption Times</a:t>
+            </a:r>
+          </a:p>
+        </p:txBody>
+      </p:sp>
+      <p:pic>
+        <p:nvPicPr>
+          <p:cNvPr id="12" name="Picture 11" descr="A geyser erupting from a volcano&#10;&#10;Description automatically generated">
+            <a:extLst>
+              <a:ext uri="{FF2B5EF4-FFF2-40B4-BE49-F238E27FC236}">
+                <a16:creationId xmlns:a16="http://schemas.microsoft.com/office/drawing/2014/main" id="{7D4F0832-9507-7EF6-4632-576AC46874E2}"/>
+              </a:ext>
+            </a:extLst>
+          </p:cNvPr>
+          <p:cNvPicPr>
+            <a:picLocks noChangeAspect="1"/>
+          </p:cNvPicPr>
+          <p:nvPr/>
+        </p:nvPicPr>
+        <p:blipFill>
+          <a:blip r:embed="rId2">
+            <a:extLst>
+              <a:ext uri="{28A0092B-C50C-407E-A947-70E740481C1C}">
+                <a14:useLocalDpi xmlns:a14="http://schemas.microsoft.com/office/drawing/2010/main" val="0"/>
+              </a:ext>
+              <a:ext uri="{837473B0-CC2E-450A-ABE3-18F120FF3D39}">
+                <a1611:picAttrSrcUrl xmlns:a1611="http://schemas.microsoft.com/office/drawing/2016/11/main" r:id="rId3"/>
+              </a:ext>
+            </a:extLst>
+          </a:blip>
+          <a:stretch>
+            <a:fillRect/>
+          </a:stretch>
+        </p:blipFill>
+        <p:spPr>
+          <a:xfrm>
+            <a:off x="257175" y="2378007"/>
+            <a:ext cx="6402243" cy="4270246"/>
+          </a:xfrm>
+          <a:prstGeom prst="rect">
+            <a:avLst/>
+          </a:prstGeom>
+        </p:spPr>
+      </p:pic>
+      <p:pic>
+        <p:nvPicPr>
+          <p:cNvPr id="14" name="Picture 13">
+            <a:extLst>
+              <a:ext uri="{FF2B5EF4-FFF2-40B4-BE49-F238E27FC236}">
+                <a16:creationId xmlns:a16="http://schemas.microsoft.com/office/drawing/2014/main" id="{9B6079F2-E75F-5FC2-3656-4040AC7A68F1}"/>
+              </a:ext>
+            </a:extLst>
+          </p:cNvPr>
+          <p:cNvPicPr>
+            <a:picLocks noChangeAspect="1"/>
+          </p:cNvPicPr>
+          <p:nvPr/>
+        </p:nvPicPr>
+        <p:blipFill>
+          <a:blip r:embed="rId4"/>
+          <a:stretch>
+            <a:fillRect/>
+          </a:stretch>
+        </p:blipFill>
+        <p:spPr>
+          <a:xfrm>
+            <a:off x="7490691" y="2278912"/>
+            <a:ext cx="4018898" cy="4369340"/>
+          </a:xfrm>
+          <a:prstGeom prst="rect">
+            <a:avLst/>
+          </a:prstGeom>
+        </p:spPr>
+      </p:pic>
+    </p:spTree>
+    <p:extLst>
+      <p:ext uri="{BB962C8B-B14F-4D97-AF65-F5344CB8AC3E}">
+        <p14:creationId xmlns:p14="http://schemas.microsoft.com/office/powerpoint/2010/main" val="3224327594"/>
+      </p:ext>
+    </p:extLst>
+  </p:cSld>
+  <p:clrMapOvr>
+    <a:masterClrMapping/>
+  </p:clrMapOvr>
+</p:sld>
+</file>
+
+<file path=ppt/slides/slide12.xml><?xml version="1.0" encoding="utf-8"?>
+<p:sld xmlns:a="http://schemas.openxmlformats.org/drawingml/2006/main" xmlns:r="http://schemas.openxmlformats.org/officeDocument/2006/relationships" xmlns:p="http://schemas.openxmlformats.org/presentationml/2006/main">
+  <p:cSld>
+    <p:spTree>
+      <p:nvGrpSpPr>
+        <p:cNvPr id="1" name=""/>
+        <p:cNvGrpSpPr/>
+        <p:nvPr/>
+      </p:nvGrpSpPr>
+      <p:grpSpPr>
+        <a:xfrm>
+          <a:off x="0" y="0"/>
+          <a:ext cx="0" cy="0"/>
+          <a:chOff x="0" y="0"/>
+          <a:chExt cx="0" cy="0"/>
+        </a:xfrm>
+      </p:grpSpPr>
+      <p:sp>
+        <p:nvSpPr>
+          <p:cNvPr id="2" name="Title 1">
+            <a:extLst>
+              <a:ext uri="{FF2B5EF4-FFF2-40B4-BE49-F238E27FC236}">
+                <a16:creationId xmlns:a16="http://schemas.microsoft.com/office/drawing/2014/main" id="{0B5FEA43-5CC7-674C-34A7-42C05AF202E3}"/>
+              </a:ext>
+            </a:extLst>
+          </p:cNvPr>
+          <p:cNvSpPr>
+            <a:spLocks noGrp="1"/>
+          </p:cNvSpPr>
+          <p:nvPr>
+            <p:ph type="title"/>
+          </p:nvPr>
+        </p:nvSpPr>
+        <p:spPr/>
+        <p:txBody>
+          <a:bodyPr/>
+          <a:lstStyle/>
+          <a:p>
+            <a:r>
+              <a:rPr lang="en-US" sz="4400" dirty="0"/>
+              <a:t>Old Faithful Eruption Times: Frequency Table</a:t>
+            </a:r>
+            <a:endParaRPr lang="en-US" dirty="0"/>
+          </a:p>
+        </p:txBody>
+      </p:sp>
+      <p:pic>
+        <p:nvPicPr>
+          <p:cNvPr id="5" name="Picture 4">
+            <a:extLst>
+              <a:ext uri="{FF2B5EF4-FFF2-40B4-BE49-F238E27FC236}">
+                <a16:creationId xmlns:a16="http://schemas.microsoft.com/office/drawing/2014/main" id="{D2A6CFA9-8621-1511-99AE-0343BA94DC76}"/>
+              </a:ext>
+            </a:extLst>
+          </p:cNvPr>
+          <p:cNvPicPr>
+            <a:picLocks noChangeAspect="1"/>
+          </p:cNvPicPr>
+          <p:nvPr/>
+        </p:nvPicPr>
+        <p:blipFill>
+          <a:blip r:embed="rId2"/>
+          <a:stretch>
+            <a:fillRect/>
+          </a:stretch>
+        </p:blipFill>
+        <p:spPr>
+          <a:xfrm>
+            <a:off x="2499810" y="2324150"/>
+            <a:ext cx="7192379" cy="3410426"/>
+          </a:xfrm>
+          <a:prstGeom prst="rect">
+            <a:avLst/>
+          </a:prstGeom>
+        </p:spPr>
+      </p:pic>
+    </p:spTree>
+    <p:extLst>
+      <p:ext uri="{BB962C8B-B14F-4D97-AF65-F5344CB8AC3E}">
+        <p14:creationId xmlns:p14="http://schemas.microsoft.com/office/powerpoint/2010/main" val="1892766331"/>
+      </p:ext>
+    </p:extLst>
+  </p:cSld>
+  <p:clrMapOvr>
+    <a:masterClrMapping/>
+  </p:clrMapOvr>
+</p:sld>
+</file>
+
+<file path=ppt/slides/slide13.xml><?xml version="1.0" encoding="utf-8"?>
+<p:sld xmlns:a="http://schemas.openxmlformats.org/drawingml/2006/main" xmlns:r="http://schemas.openxmlformats.org/officeDocument/2006/relationships" xmlns:p="http://schemas.openxmlformats.org/presentationml/2006/main">
+  <p:cSld>
     <p:bg>
       <p:bgPr>
         <a:solidFill>
@@ -10044,7 +10396,7 @@
 </p:sld>
 </file>
 
-<file path=ppt/slides/slide11.xml><?xml version="1.0" encoding="utf-8"?>
+<file path=ppt/slides/slide14.xml><?xml version="1.0" encoding="utf-8"?>
 <p:sld xmlns:a="http://schemas.openxmlformats.org/drawingml/2006/main" xmlns:r="http://schemas.openxmlformats.org/officeDocument/2006/relationships" xmlns:p="http://schemas.openxmlformats.org/presentationml/2006/main">
   <p:cSld>
     <p:spTree>
@@ -10125,358 +10477,6 @@
     <p:extLst>
       <p:ext uri="{BB962C8B-B14F-4D97-AF65-F5344CB8AC3E}">
         <p14:creationId xmlns:p14="http://schemas.microsoft.com/office/powerpoint/2010/main" val="2676625562"/>
-      </p:ext>
-    </p:extLst>
-  </p:cSld>
-  <p:clrMapOvr>
-    <a:masterClrMapping/>
-  </p:clrMapOvr>
-</p:sld>
-</file>
-
-<file path=ppt/slides/slide12.xml><?xml version="1.0" encoding="utf-8"?>
-<p:sld xmlns:a="http://schemas.openxmlformats.org/drawingml/2006/main" xmlns:r="http://schemas.openxmlformats.org/officeDocument/2006/relationships" xmlns:p="http://schemas.openxmlformats.org/presentationml/2006/main">
-  <p:cSld>
-    <p:spTree>
-      <p:nvGrpSpPr>
-        <p:cNvPr id="1" name=""/>
-        <p:cNvGrpSpPr/>
-        <p:nvPr/>
-      </p:nvGrpSpPr>
-      <p:grpSpPr>
-        <a:xfrm>
-          <a:off x="0" y="0"/>
-          <a:ext cx="0" cy="0"/>
-          <a:chOff x="0" y="0"/>
-          <a:chExt cx="0" cy="0"/>
-        </a:xfrm>
-      </p:grpSpPr>
-      <p:sp>
-        <p:nvSpPr>
-          <p:cNvPr id="2" name="Title 1">
-            <a:extLst>
-              <a:ext uri="{FF2B5EF4-FFF2-40B4-BE49-F238E27FC236}">
-                <a16:creationId xmlns:a16="http://schemas.microsoft.com/office/drawing/2014/main" id="{476194FF-DF74-EF86-DF92-8D34A4EA85C3}"/>
-              </a:ext>
-            </a:extLst>
-          </p:cNvPr>
-          <p:cNvSpPr>
-            <a:spLocks noGrp="1"/>
-          </p:cNvSpPr>
-          <p:nvPr>
-            <p:ph type="title"/>
-          </p:nvPr>
-        </p:nvSpPr>
-        <p:spPr/>
-        <p:txBody>
-          <a:bodyPr/>
-          <a:lstStyle/>
-          <a:p>
-            <a:r>
-              <a:rPr lang="en-US" dirty="0"/>
-              <a:t>Frequency Tables for Continuous Variables</a:t>
-            </a:r>
-          </a:p>
-        </p:txBody>
-      </p:sp>
-      <p:sp>
-        <p:nvSpPr>
-          <p:cNvPr id="3" name="Content Placeholder 2">
-            <a:extLst>
-              <a:ext uri="{FF2B5EF4-FFF2-40B4-BE49-F238E27FC236}">
-                <a16:creationId xmlns:a16="http://schemas.microsoft.com/office/drawing/2014/main" id="{B8E94895-622E-4F90-9B01-BC714AD08FD2}"/>
-              </a:ext>
-            </a:extLst>
-          </p:cNvPr>
-          <p:cNvSpPr>
-            <a:spLocks noGrp="1"/>
-          </p:cNvSpPr>
-          <p:nvPr>
-            <p:ph idx="1"/>
-          </p:nvPr>
-        </p:nvSpPr>
-        <p:spPr>
-          <a:xfrm>
-            <a:off x="838200" y="1825625"/>
-            <a:ext cx="10236200" cy="4351338"/>
-          </a:xfrm>
-        </p:spPr>
-        <p:txBody>
-          <a:bodyPr/>
-          <a:lstStyle/>
-          <a:p>
-            <a:r>
-              <a:rPr lang="en-US" dirty="0"/>
-              <a:t>The number of possible values is usually very large </a:t>
-            </a:r>
-          </a:p>
-          <a:p>
-            <a:r>
-              <a:rPr lang="en-US" dirty="0"/>
-              <a:t>Convert continuous values into discrete groups (sometimes called bins):</a:t>
-            </a:r>
-          </a:p>
-          <a:p>
-            <a:endParaRPr lang="en-US" dirty="0"/>
-          </a:p>
-          <a:p>
-            <a:pPr marL="0" indent="0">
-              <a:buNone/>
-            </a:pPr>
-            <a:r>
-              <a:rPr lang="en-US" b="1" dirty="0"/>
-              <a:t>Steps: </a:t>
-            </a:r>
-          </a:p>
-          <a:p>
-            <a:pPr marL="514350" indent="-514350">
-              <a:buFont typeface="+mj-lt"/>
-              <a:buAutoNum type="arabicPeriod"/>
-            </a:pPr>
-            <a:r>
-              <a:rPr lang="en-US" dirty="0"/>
-              <a:t>Divide the range of the variable into a set of non-overlapping intervals</a:t>
-            </a:r>
-          </a:p>
-          <a:p>
-            <a:pPr marL="514350" indent="-514350">
-              <a:buFont typeface="+mj-lt"/>
-              <a:buAutoNum type="arabicPeriod"/>
-            </a:pPr>
-            <a:r>
-              <a:rPr lang="en-US" dirty="0"/>
-              <a:t>Count the number of values that fall into each interval</a:t>
-            </a:r>
-          </a:p>
-        </p:txBody>
-      </p:sp>
-    </p:spTree>
-    <p:extLst>
-      <p:ext uri="{BB962C8B-B14F-4D97-AF65-F5344CB8AC3E}">
-        <p14:creationId xmlns:p14="http://schemas.microsoft.com/office/powerpoint/2010/main" val="967060633"/>
-      </p:ext>
-    </p:extLst>
-  </p:cSld>
-  <p:clrMapOvr>
-    <a:masterClrMapping/>
-  </p:clrMapOvr>
-</p:sld>
-</file>
-
-<file path=ppt/slides/slide13.xml><?xml version="1.0" encoding="utf-8"?>
-<p:sld xmlns:a="http://schemas.openxmlformats.org/drawingml/2006/main" xmlns:r="http://schemas.openxmlformats.org/officeDocument/2006/relationships" xmlns:p="http://schemas.openxmlformats.org/presentationml/2006/main">
-  <p:cSld>
-    <p:spTree>
-      <p:nvGrpSpPr>
-        <p:cNvPr id="1" name=""/>
-        <p:cNvGrpSpPr/>
-        <p:nvPr/>
-      </p:nvGrpSpPr>
-      <p:grpSpPr>
-        <a:xfrm>
-          <a:off x="0" y="0"/>
-          <a:ext cx="0" cy="0"/>
-          <a:chOff x="0" y="0"/>
-          <a:chExt cx="0" cy="0"/>
-        </a:xfrm>
-      </p:grpSpPr>
-      <p:sp>
-        <p:nvSpPr>
-          <p:cNvPr id="2" name="Title 1">
-            <a:extLst>
-              <a:ext uri="{FF2B5EF4-FFF2-40B4-BE49-F238E27FC236}">
-                <a16:creationId xmlns:a16="http://schemas.microsoft.com/office/drawing/2014/main" id="{A2418BEF-F19E-DBAD-FF9A-8FDF1FBD3654}"/>
-              </a:ext>
-            </a:extLst>
-          </p:cNvPr>
-          <p:cNvSpPr>
-            <a:spLocks noGrp="1"/>
-          </p:cNvSpPr>
-          <p:nvPr>
-            <p:ph type="title"/>
-          </p:nvPr>
-        </p:nvSpPr>
-        <p:spPr>
-          <a:xfrm>
-            <a:off x="838200" y="365126"/>
-            <a:ext cx="10515600" cy="825500"/>
-          </a:xfrm>
-        </p:spPr>
-        <p:txBody>
-          <a:bodyPr>
-            <a:normAutofit/>
-          </a:bodyPr>
-          <a:lstStyle/>
-          <a:p>
-            <a:r>
-              <a:rPr lang="en-US" sz="4000" dirty="0"/>
-              <a:t>Example: Old Faithful Eruption Times</a:t>
-            </a:r>
-          </a:p>
-        </p:txBody>
-      </p:sp>
-      <p:pic>
-        <p:nvPicPr>
-          <p:cNvPr id="12" name="Picture 11" descr="A geyser erupting from a volcano&#10;&#10;Description automatically generated">
-            <a:extLst>
-              <a:ext uri="{FF2B5EF4-FFF2-40B4-BE49-F238E27FC236}">
-                <a16:creationId xmlns:a16="http://schemas.microsoft.com/office/drawing/2014/main" id="{7D4F0832-9507-7EF6-4632-576AC46874E2}"/>
-              </a:ext>
-            </a:extLst>
-          </p:cNvPr>
-          <p:cNvPicPr>
-            <a:picLocks noChangeAspect="1"/>
-          </p:cNvPicPr>
-          <p:nvPr/>
-        </p:nvPicPr>
-        <p:blipFill>
-          <a:blip r:embed="rId2">
-            <a:extLst>
-              <a:ext uri="{28A0092B-C50C-407E-A947-70E740481C1C}">
-                <a14:useLocalDpi xmlns:a14="http://schemas.microsoft.com/office/drawing/2010/main" val="0"/>
-              </a:ext>
-              <a:ext uri="{837473B0-CC2E-450A-ABE3-18F120FF3D39}">
-                <a1611:picAttrSrcUrl xmlns:a1611="http://schemas.microsoft.com/office/drawing/2016/11/main" r:id="rId3"/>
-              </a:ext>
-            </a:extLst>
-          </a:blip>
-          <a:stretch>
-            <a:fillRect/>
-          </a:stretch>
-        </p:blipFill>
-        <p:spPr>
-          <a:xfrm>
-            <a:off x="257175" y="2378007"/>
-            <a:ext cx="6402243" cy="4270246"/>
-          </a:xfrm>
-          <a:prstGeom prst="rect">
-            <a:avLst/>
-          </a:prstGeom>
-        </p:spPr>
-      </p:pic>
-      <p:pic>
-        <p:nvPicPr>
-          <p:cNvPr id="14" name="Picture 13">
-            <a:extLst>
-              <a:ext uri="{FF2B5EF4-FFF2-40B4-BE49-F238E27FC236}">
-                <a16:creationId xmlns:a16="http://schemas.microsoft.com/office/drawing/2014/main" id="{9B6079F2-E75F-5FC2-3656-4040AC7A68F1}"/>
-              </a:ext>
-            </a:extLst>
-          </p:cNvPr>
-          <p:cNvPicPr>
-            <a:picLocks noChangeAspect="1"/>
-          </p:cNvPicPr>
-          <p:nvPr/>
-        </p:nvPicPr>
-        <p:blipFill>
-          <a:blip r:embed="rId4"/>
-          <a:stretch>
-            <a:fillRect/>
-          </a:stretch>
-        </p:blipFill>
-        <p:spPr>
-          <a:xfrm>
-            <a:off x="7490691" y="2278912"/>
-            <a:ext cx="4018898" cy="4369340"/>
-          </a:xfrm>
-          <a:prstGeom prst="rect">
-            <a:avLst/>
-          </a:prstGeom>
-        </p:spPr>
-      </p:pic>
-    </p:spTree>
-    <p:extLst>
-      <p:ext uri="{BB962C8B-B14F-4D97-AF65-F5344CB8AC3E}">
-        <p14:creationId xmlns:p14="http://schemas.microsoft.com/office/powerpoint/2010/main" val="3224327594"/>
-      </p:ext>
-    </p:extLst>
-  </p:cSld>
-  <p:clrMapOvr>
-    <a:masterClrMapping/>
-  </p:clrMapOvr>
-</p:sld>
-</file>
-
-<file path=ppt/slides/slide14.xml><?xml version="1.0" encoding="utf-8"?>
-<p:sld xmlns:a="http://schemas.openxmlformats.org/drawingml/2006/main" xmlns:r="http://schemas.openxmlformats.org/officeDocument/2006/relationships" xmlns:p="http://schemas.openxmlformats.org/presentationml/2006/main">
-  <p:cSld>
-    <p:spTree>
-      <p:nvGrpSpPr>
-        <p:cNvPr id="1" name=""/>
-        <p:cNvGrpSpPr/>
-        <p:nvPr/>
-      </p:nvGrpSpPr>
-      <p:grpSpPr>
-        <a:xfrm>
-          <a:off x="0" y="0"/>
-          <a:ext cx="0" cy="0"/>
-          <a:chOff x="0" y="0"/>
-          <a:chExt cx="0" cy="0"/>
-        </a:xfrm>
-      </p:grpSpPr>
-      <p:sp>
-        <p:nvSpPr>
-          <p:cNvPr id="2" name="Title 1">
-            <a:extLst>
-              <a:ext uri="{FF2B5EF4-FFF2-40B4-BE49-F238E27FC236}">
-                <a16:creationId xmlns:a16="http://schemas.microsoft.com/office/drawing/2014/main" id="{0B5FEA43-5CC7-674C-34A7-42C05AF202E3}"/>
-              </a:ext>
-            </a:extLst>
-          </p:cNvPr>
-          <p:cNvSpPr>
-            <a:spLocks noGrp="1"/>
-          </p:cNvSpPr>
-          <p:nvPr>
-            <p:ph type="title"/>
-          </p:nvPr>
-        </p:nvSpPr>
-        <p:spPr/>
-        <p:txBody>
-          <a:bodyPr/>
-          <a:lstStyle/>
-          <a:p>
-            <a:r>
-              <a:rPr lang="en-US" sz="4400" dirty="0"/>
-              <a:t>Old Faithful Eruption Times: Frequency Table</a:t>
-            </a:r>
-            <a:endParaRPr lang="en-US" dirty="0"/>
-          </a:p>
-        </p:txBody>
-      </p:sp>
-      <p:pic>
-        <p:nvPicPr>
-          <p:cNvPr id="5" name="Picture 4">
-            <a:extLst>
-              <a:ext uri="{FF2B5EF4-FFF2-40B4-BE49-F238E27FC236}">
-                <a16:creationId xmlns:a16="http://schemas.microsoft.com/office/drawing/2014/main" id="{D2A6CFA9-8621-1511-99AE-0343BA94DC76}"/>
-              </a:ext>
-            </a:extLst>
-          </p:cNvPr>
-          <p:cNvPicPr>
-            <a:picLocks noChangeAspect="1"/>
-          </p:cNvPicPr>
-          <p:nvPr/>
-        </p:nvPicPr>
-        <p:blipFill>
-          <a:blip r:embed="rId2"/>
-          <a:stretch>
-            <a:fillRect/>
-          </a:stretch>
-        </p:blipFill>
-        <p:spPr>
-          <a:xfrm>
-            <a:off x="2499810" y="2324150"/>
-            <a:ext cx="7192379" cy="3410426"/>
-          </a:xfrm>
-          <a:prstGeom prst="rect">
-            <a:avLst/>
-          </a:prstGeom>
-        </p:spPr>
-      </p:pic>
-    </p:spTree>
-    <p:extLst>
-      <p:ext uri="{BB962C8B-B14F-4D97-AF65-F5344CB8AC3E}">
-        <p14:creationId xmlns:p14="http://schemas.microsoft.com/office/powerpoint/2010/main" val="1892766331"/>
       </p:ext>
     </p:extLst>
   </p:cSld>

--- a/docs/lecture_slides/Week 1/Week1_Lecture2_Slides_1_12_2024.pptx
+++ b/docs/lecture_slides/Week 1/Week1_Lecture2_Slides_1_12_2024.pptx
@@ -6255,7 +6255,7 @@
           <a:p>
             <a:r>
               <a:rPr lang="en-US" dirty="0"/>
-              <a:t>Example</a:t>
+              <a:t>Example: Penguins at Torgersen Island</a:t>
             </a:r>
           </a:p>
         </p:txBody>

--- a/docs/lecture_slides/Week 1/Week1_Lecture2_Slides_1_12_2024.pptx
+++ b/docs/lecture_slides/Week 1/Week1_Lecture2_Slides_1_12_2024.pptx
@@ -6117,7 +6117,7 @@
           <a:p>
             <a:r>
               <a:rPr lang="en-US" sz="5400"/>
-              <a:t>Example: Gallup Pool</a:t>
+              <a:t>Example: Gallup Poll</a:t>
             </a:r>
           </a:p>
         </p:txBody>
@@ -6140,8 +6140,8 @@
         </p:nvSpPr>
         <p:spPr>
           <a:xfrm>
-            <a:off x="572493" y="2071316"/>
-            <a:ext cx="6713552" cy="4119172"/>
+            <a:off x="572493" y="1905000"/>
+            <a:ext cx="6713552" cy="4572000"/>
           </a:xfrm>
         </p:spPr>
         <p:txBody>
@@ -6158,31 +6158,58 @@
           <a:p>
             <a:r>
               <a:rPr lang="en-US" sz="1900" dirty="0"/>
-              <a:t>In response to the spill, many activists called for an end to offshore drilling for oil. </a:t>
+              <a:t>In response to the spill, many activists called for an end to offshore drilling. Almost nine months later, turbulence in the Middle East pushed the price of oil to an all-time high.</a:t>
             </a:r>
           </a:p>
           <a:p>
             <a:r>
               <a:rPr lang="en-US" sz="1900" dirty="0"/>
-              <a:t>Almost nine months later, turbulence in the middle east caused the price of oil to surge to an all-time high. </a:t>
+              <a:t>In March 2011, Gallup conducted a survey and found that 60% of Americans favored offshore drilling as a means to reduce U.S. dependence on foreign oil.</a:t>
             </a:r>
           </a:p>
           <a:p>
             <a:r>
               <a:rPr lang="en-US" sz="1900" dirty="0"/>
-              <a:t>In March 2011, Gallup conducted a survey and found that 60% of Americans favored offshore drilling as means to reduce U.S dependence on foreign oil.</a:t>
-            </a:r>
-          </a:p>
-          <a:p>
-            <a:r>
-              <a:rPr lang="en-US" sz="1900" dirty="0"/>
-              <a:t>The poll was based on interviews with 1,021 adults aged 18 and older, living in the continental U.S, and selected using random digit dialing. </a:t>
+              <a:t>The poll interviewed 1,021 adults aged 18 and older in the continental U.S., selected by random digit dialing.</a:t>
             </a:r>
           </a:p>
           <a:p>
             <a:r>
               <a:rPr lang="en-US" sz="1900" b="1" dirty="0"/>
-              <a:t>What is the population under study, and what is the population parameter being estimated? What is the sample statistic ?</a:t>
+              <a:t>What is the population, and what parameter is being estimated?</a:t>
+            </a:r>
+          </a:p>
+          <a:p>
+            <a:pPr marL="342900" indent="0">
+              <a:buNone/>
+            </a:pPr>
+            <a:r>
+              <a:rPr lang="en-US" sz="1900" dirty="0">
+                <a:solidFill>
+                  <a:srgbClr val="FF0000"/>
+                </a:solidFill>
+              </a:rPr>
+              <a:t>All adults 18 and older in the continental U.S.; the parameter is p, the true proportion of them who favor offshore drilling.</a:t>
+            </a:r>
+          </a:p>
+          <a:p>
+            <a:pPr marL="342900" indent="-342900"/>
+            <a:r>
+              <a:rPr lang="en-US" sz="1900" b="1" dirty="0"/>
+              <a:t>What is the sample, and what is the statistic?</a:t>
+            </a:r>
+          </a:p>
+          <a:p>
+            <a:pPr marL="342900" indent="0">
+              <a:buNone/>
+            </a:pPr>
+            <a:r>
+              <a:rPr lang="en-US" sz="1900" dirty="0">
+                <a:solidFill>
+                  <a:srgbClr val="FF0000"/>
+                </a:solidFill>
+              </a:rPr>
+              <a:t>The 1,021 adults interviewed (n = 1,021); the statistic is p̂ = 0.60.</a:t>
             </a:r>
           </a:p>
         </p:txBody>
@@ -6235,6 +6262,134 @@
   <p:clrMapOvr>
     <a:masterClrMapping/>
   </p:clrMapOvr>
+  <p:timing>
+    <p:tnLst>
+      <p:par>
+        <p:cTn id="1" dur="indefinite" restart="never" nodeType="tmRoot">
+          <p:childTnLst>
+            <p:seq concurrent="1" nextAc="seek">
+              <p:cTn id="2" dur="indefinite" nodeType="mainSeq">
+                <p:childTnLst>
+                  <p:par>
+                    <p:cTn id="3" fill="hold">
+                      <p:stCondLst>
+                        <p:cond delay="indefinite"/>
+                      </p:stCondLst>
+                      <p:childTnLst>
+                        <p:par>
+                          <p:cTn id="4" fill="hold">
+                            <p:stCondLst>
+                              <p:cond delay="0"/>
+                            </p:stCondLst>
+                            <p:childTnLst>
+                              <p:par>
+                                <p:cTn id="5" presetID="1" presetClass="entr" presetSubtype="0" fill="hold" nodeType="clickEffect">
+                                  <p:stCondLst>
+                                    <p:cond delay="0"/>
+                                  </p:stCondLst>
+                                  <p:childTnLst>
+                                    <p:set>
+                                      <p:cBhvr>
+                                        <p:cTn id="6" dur="1" fill="hold">
+                                          <p:stCondLst>
+                                            <p:cond delay="0"/>
+                                          </p:stCondLst>
+                                        </p:cTn>
+                                        <p:tgtEl>
+                                          <p:spTgt spid="3">
+                                            <p:txEl>
+                                              <p:pRg st="6" end="6"/>
+                                            </p:txEl>
+                                          </p:spTgt>
+                                        </p:tgtEl>
+                                        <p:attrNameLst>
+                                          <p:attrName>style.visibility</p:attrName>
+                                        </p:attrNameLst>
+                                      </p:cBhvr>
+                                      <p:to>
+                                        <p:strVal val="visible"/>
+                                      </p:to>
+                                    </p:set>
+                                  </p:childTnLst>
+                                </p:cTn>
+                              </p:par>
+                            </p:childTnLst>
+                          </p:cTn>
+                        </p:par>
+                      </p:childTnLst>
+                    </p:cTn>
+                  </p:par>
+                  <p:par>
+                    <p:cTn id="7" fill="hold">
+                      <p:stCondLst>
+                        <p:cond delay="indefinite"/>
+                      </p:stCondLst>
+                      <p:childTnLst>
+                        <p:par>
+                          <p:cTn id="8" fill="hold">
+                            <p:stCondLst>
+                              <p:cond delay="0"/>
+                            </p:stCondLst>
+                            <p:childTnLst>
+                              <p:par>
+                                <p:cTn id="9" presetID="1" presetClass="entr" presetSubtype="0" fill="hold" nodeType="clickEffect">
+                                  <p:stCondLst>
+                                    <p:cond delay="0"/>
+                                  </p:stCondLst>
+                                  <p:childTnLst>
+                                    <p:set>
+                                      <p:cBhvr>
+                                        <p:cTn id="10" dur="1" fill="hold">
+                                          <p:stCondLst>
+                                            <p:cond delay="0"/>
+                                          </p:stCondLst>
+                                        </p:cTn>
+                                        <p:tgtEl>
+                                          <p:spTgt spid="3">
+                                            <p:txEl>
+                                              <p:pRg st="8" end="8"/>
+                                            </p:txEl>
+                                          </p:spTgt>
+                                        </p:tgtEl>
+                                        <p:attrNameLst>
+                                          <p:attrName>style.visibility</p:attrName>
+                                        </p:attrNameLst>
+                                      </p:cBhvr>
+                                      <p:to>
+                                        <p:strVal val="visible"/>
+                                      </p:to>
+                                    </p:set>
+                                  </p:childTnLst>
+                                </p:cTn>
+                              </p:par>
+                            </p:childTnLst>
+                          </p:cTn>
+                        </p:par>
+                      </p:childTnLst>
+                    </p:cTn>
+                  </p:par>
+                </p:childTnLst>
+              </p:cTn>
+              <p:prevCondLst>
+                <p:cond evt="onPrev" delay="0">
+                  <p:tgtEl>
+                    <p:sldTgt/>
+                  </p:tgtEl>
+                </p:cond>
+              </p:prevCondLst>
+              <p:nextCondLst>
+                <p:cond evt="onNext" delay="0">
+                  <p:tgtEl>
+                    <p:sldTgt/>
+                  </p:tgtEl>
+                </p:cond>
+              </p:nextCondLst>
+            </p:seq>
+          </p:childTnLst>
+        </p:cTn>
+      </p:par>
+    </p:tnLst>
+  </p:timing>
 </p:sld>
 </file>
 
@@ -6614,7 +6769,7 @@
                       <a:srgbClr val="FF0000"/>
                     </a:solidFill>
                   </a:rPr>
-                  <a:t>Who will win the California Race for Governor</a:t>
+                  <a:t>Who will win the California race for governor?</a:t>
                 </a:r>
               </a:p>
               <a:p>
@@ -6650,7 +6805,7 @@
                       <a:srgbClr val="FF0000"/>
                     </a:solidFill>
                   </a:rPr>
-                  <a:t>The population is all eligible voters in the state of California</a:t>
+                  <a:t>All Californians who actually voted – not everyone eligible. N is unknown that night.</a:t>
                 </a:r>
               </a:p>
               <a:p>
@@ -6659,7 +6814,7 @@
                 </a:pPr>
                 <a:r>
                   <a:rPr lang="en-US" sz="2000" dirty="0"/>
-                  <a:t>What is the sample ? What is the sample size </a:t>
+                  <a:t>What is the sample? What is the sample size </a:t>
                 </a:r>
                 <a14:m>
                   <m:oMath xmlns:m="http://schemas.openxmlformats.org/officeDocument/2006/math">
@@ -6686,7 +6841,7 @@
                       <a:srgbClr val="FF0000"/>
                     </a:solidFill>
                   </a:rPr>
-                  <a:t>All voters interviewed at the election booth; 3,889 people</a:t>
+                  <a:t>The 3,889 voters interviewed as they left the booth; n = 3,889.</a:t>
                 </a:r>
               </a:p>
               <a:p>
@@ -6708,7 +6863,7 @@
                       <a:srgbClr val="FF0000"/>
                     </a:solidFill>
                   </a:rPr>
-                  <a:t>The proportion of 3,889 voters casting their vote for Democrat Jerry Brown </a:t>
+                  <a:t>p̂ = 0.531, the proportion of those 3,889 who chose Brown.</a:t>
                 </a:r>
               </a:p>
             </p:txBody>
@@ -10021,7 +10176,7 @@
         </p:nvSpPr>
         <p:spPr>
           <a:xfrm>
-            <a:off x="306534" y="1612616"/>
+            <a:off x="306534" y="1362616"/>
             <a:ext cx="6382326" cy="5293757"/>
           </a:xfrm>
           <a:prstGeom prst="rect">
@@ -10144,7 +10299,7 @@
                 </a:solidFill>
                 <a:latin typeface="Calibri" panose="020F0502020204030204"/>
               </a:rPr>
-              <a:t>finite/countable</a:t>
+              <a:t>finite</a:t>
             </a:r>
             <a:r>
               <a:rPr lang="it-IT" sz="2000" dirty="0">
@@ -10153,7 +10308,7 @@
                 </a:solidFill>
                 <a:latin typeface="Calibri" panose="020F0502020204030204"/>
               </a:rPr>
-              <a:t>  (e.g. All employees at a company) or </a:t>
+              <a:t> (e.g. all employees at a company) or </a:t>
             </a:r>
             <a:r>
               <a:rPr lang="it-IT" sz="2000" i="1" dirty="0">
@@ -10171,7 +10326,7 @@
                 </a:solidFill>
                 <a:latin typeface="Calibri" panose="020F0502020204030204"/>
               </a:rPr>
-              <a:t> and potentially </a:t>
+              <a:t> and </a:t>
             </a:r>
             <a:r>
               <a:rPr lang="it-IT" sz="2000" i="1" dirty="0">
@@ -10180,7 +10335,7 @@
                 </a:solidFill>
                 <a:latin typeface="Calibri" panose="020F0502020204030204"/>
               </a:rPr>
-              <a:t>infinite/uncountable</a:t>
+              <a:t>unlimited</a:t>
             </a:r>
             <a:r>
               <a:rPr lang="it-IT" sz="2000" dirty="0">
@@ -10189,7 +10344,7 @@
                 </a:solidFill>
                 <a:latin typeface="Calibri" panose="020F0502020204030204"/>
               </a:rPr>
-              <a:t> (e.g all possible hands in a game of poker)</a:t>
+              <a:t> (e.g. every hand that could ever be dealt in poker – a process we can repeat indefinitely)</a:t>
             </a:r>
           </a:p>
           <a:p>
@@ -10612,6 +10767,174 @@
   <p:clrMapOvr>
     <a:masterClrMapping/>
   </p:clrMapOvr>
+  <p:timing>
+    <p:tnLst>
+      <p:par>
+        <p:cTn id="1" dur="indefinite" restart="never" nodeType="tmRoot">
+          <p:childTnLst>
+            <p:seq concurrent="1" nextAc="seek">
+              <p:cTn id="2" dur="indefinite" nodeType="mainSeq">
+                <p:childTnLst>
+                  <p:par>
+                    <p:cTn id="3" fill="hold">
+                      <p:stCondLst>
+                        <p:cond delay="indefinite"/>
+                      </p:stCondLst>
+                      <p:childTnLst>
+                        <p:par>
+                          <p:cTn id="4" fill="hold">
+                            <p:stCondLst>
+                              <p:cond delay="0"/>
+                            </p:stCondLst>
+                            <p:childTnLst>
+                              <p:par>
+                                <p:cTn id="5" presetID="1" presetClass="entr" presetSubtype="0" fill="hold" nodeType="clickEffect">
+                                  <p:stCondLst>
+                                    <p:cond delay="0"/>
+                                  </p:stCondLst>
+                                  <p:childTnLst>
+                                    <p:set>
+                                      <p:cBhvr>
+                                        <p:cTn id="6" dur="1" fill="hold">
+                                          <p:stCondLst>
+                                            <p:cond delay="0"/>
+                                          </p:stCondLst>
+                                        </p:cTn>
+                                        <p:tgtEl>
+                                          <p:spTgt spid="3">
+                                            <p:txEl>
+                                              <p:pRg st="4" end="4"/>
+                                            </p:txEl>
+                                          </p:spTgt>
+                                        </p:tgtEl>
+                                        <p:attrNameLst>
+                                          <p:attrName>style.visibility</p:attrName>
+                                        </p:attrNameLst>
+                                      </p:cBhvr>
+                                      <p:to>
+                                        <p:strVal val="visible"/>
+                                      </p:to>
+                                    </p:set>
+                                  </p:childTnLst>
+                                </p:cTn>
+                              </p:par>
+                              <p:par>
+                                <p:cTn id="7" presetID="1" presetClass="entr" presetSubtype="0" fill="hold" nodeType="withEffect">
+                                  <p:stCondLst>
+                                    <p:cond delay="0"/>
+                                  </p:stCondLst>
+                                  <p:childTnLst>
+                                    <p:set>
+                                      <p:cBhvr>
+                                        <p:cTn id="8" dur="1" fill="hold">
+                                          <p:stCondLst>
+                                            <p:cond delay="0"/>
+                                          </p:stCondLst>
+                                        </p:cTn>
+                                        <p:tgtEl>
+                                          <p:spTgt spid="3">
+                                            <p:txEl>
+                                              <p:pRg st="5" end="5"/>
+                                            </p:txEl>
+                                          </p:spTgt>
+                                        </p:tgtEl>
+                                        <p:attrNameLst>
+                                          <p:attrName>style.visibility</p:attrName>
+                                        </p:attrNameLst>
+                                      </p:cBhvr>
+                                      <p:to>
+                                        <p:strVal val="visible"/>
+                                      </p:to>
+                                    </p:set>
+                                  </p:childTnLst>
+                                </p:cTn>
+                              </p:par>
+                              <p:par>
+                                <p:cTn id="9" presetID="1" presetClass="entr" presetSubtype="0" fill="hold" nodeType="withEffect">
+                                  <p:stCondLst>
+                                    <p:cond delay="0"/>
+                                  </p:stCondLst>
+                                  <p:childTnLst>
+                                    <p:set>
+                                      <p:cBhvr>
+                                        <p:cTn id="10" dur="1" fill="hold">
+                                          <p:stCondLst>
+                                            <p:cond delay="0"/>
+                                          </p:stCondLst>
+                                        </p:cTn>
+                                        <p:tgtEl>
+                                          <p:spTgt spid="3">
+                                            <p:txEl>
+                                              <p:pRg st="6" end="6"/>
+                                            </p:txEl>
+                                          </p:spTgt>
+                                        </p:tgtEl>
+                                        <p:attrNameLst>
+                                          <p:attrName>style.visibility</p:attrName>
+                                        </p:attrNameLst>
+                                      </p:cBhvr>
+                                      <p:to>
+                                        <p:strVal val="visible"/>
+                                      </p:to>
+                                    </p:set>
+                                  </p:childTnLst>
+                                </p:cTn>
+                              </p:par>
+                              <p:par>
+                                <p:cTn id="11" presetID="1" presetClass="entr" presetSubtype="0" fill="hold" nodeType="withEffect">
+                                  <p:stCondLst>
+                                    <p:cond delay="0"/>
+                                  </p:stCondLst>
+                                  <p:childTnLst>
+                                    <p:set>
+                                      <p:cBhvr>
+                                        <p:cTn id="12" dur="1" fill="hold">
+                                          <p:stCondLst>
+                                            <p:cond delay="0"/>
+                                          </p:stCondLst>
+                                        </p:cTn>
+                                        <p:tgtEl>
+                                          <p:spTgt spid="4"/>
+                                        </p:tgtEl>
+                                        <p:attrNameLst>
+                                          <p:attrName>style.visibility</p:attrName>
+                                        </p:attrNameLst>
+                                      </p:cBhvr>
+                                      <p:to>
+                                        <p:strVal val="visible"/>
+                                      </p:to>
+                                    </p:set>
+                                  </p:childTnLst>
+                                </p:cTn>
+                              </p:par>
+                            </p:childTnLst>
+                          </p:cTn>
+                        </p:par>
+                      </p:childTnLst>
+                    </p:cTn>
+                  </p:par>
+                </p:childTnLst>
+              </p:cTn>
+              <p:prevCondLst>
+                <p:cond evt="onPrev" delay="0">
+                  <p:tgtEl>
+                    <p:sldTgt/>
+                  </p:tgtEl>
+                </p:cond>
+              </p:prevCondLst>
+              <p:nextCondLst>
+                <p:cond evt="onNext" delay="0">
+                  <p:tgtEl>
+                    <p:sldTgt/>
+                  </p:tgtEl>
+                </p:cond>
+              </p:nextCondLst>
+            </p:seq>
+          </p:childTnLst>
+        </p:cTn>
+      </p:par>
+    </p:tnLst>
+  </p:timing>
 </p:sld>
 </file>
 
@@ -11093,8 +11416,8 @@
           </p:sp>
         </mc:Fallback>
       </mc:AlternateContent>
-      <mc:AlternateContent xmlns:mc="http://schemas.openxmlformats.org/markup-compatibility/2006">
-        <mc:Choice xmlns:a14="http://schemas.microsoft.com/office/drawing/2010/main" Requires="a14">
+      <mc:AlternateContent xmlns:mc="http://schemas.openxmlformats.org/markup-compatibility/2006" xmlns:a14="http://schemas.microsoft.com/office/drawing/2010/main">
+        <mc:Choice Requires="a14">
           <p:sp>
             <p:nvSpPr>
               <p:cNvPr id="19" name="TextBox 18">
@@ -11148,7 +11471,7 @@
             </p:txBody>
           </p:sp>
         </mc:Choice>
-        <mc:Fallback>
+        <mc:Fallback xmlns="">
           <p:sp>
             <p:nvSpPr>
               <p:cNvPr id="19" name="TextBox 18">

--- a/docs/lecture_slides/Week 1/Week1_Lecture2_Slides_1_12_2024.pptx
+++ b/docs/lecture_slides/Week 1/Week1_Lecture2_Slides_1_12_2024.pptx
@@ -24,8 +24,6 @@
     <p:sldId id="268" r:id="rId18"/>
     <p:sldId id="269" r:id="rId19"/>
     <p:sldId id="276" r:id="rId20"/>
-    <p:sldId id="272" r:id="rId21"/>
-    <p:sldId id="285" r:id="rId22"/>
   </p:sldIdLst>
   <p:sldSz cx="12192000" cy="6858000"/>
   <p:notesSz cx="6858000" cy="9144000"/>
@@ -8443,700 +8441,6 @@
       </p:par>
     </p:tnLst>
   </p:timing>
-</p:sld>
-</file>
-
-<file path=ppt/slides/slide20.xml><?xml version="1.0" encoding="utf-8"?>
-<p:sld xmlns:a="http://schemas.openxmlformats.org/drawingml/2006/main" xmlns:r="http://schemas.openxmlformats.org/officeDocument/2006/relationships" xmlns:p="http://schemas.openxmlformats.org/presentationml/2006/main">
-  <p:cSld>
-    <p:bg>
-      <p:bgPr>
-        <a:solidFill>
-          <a:schemeClr val="bg1"/>
-        </a:solidFill>
-        <a:effectLst/>
-      </p:bgPr>
-    </p:bg>
-    <p:spTree>
-      <p:nvGrpSpPr>
-        <p:cNvPr id="1" name=""/>
-        <p:cNvGrpSpPr/>
-        <p:nvPr/>
-      </p:nvGrpSpPr>
-      <p:grpSpPr>
-        <a:xfrm>
-          <a:off x="0" y="0"/>
-          <a:ext cx="0" cy="0"/>
-          <a:chOff x="0" y="0"/>
-          <a:chExt cx="0" cy="0"/>
-        </a:xfrm>
-      </p:grpSpPr>
-      <p:sp useBgFill="1">
-        <p:nvSpPr>
-          <p:cNvPr id="10" name="Rectangle 9">
-            <a:extLst>
-              <a:ext uri="{FF2B5EF4-FFF2-40B4-BE49-F238E27FC236}">
-                <a16:creationId xmlns:a16="http://schemas.microsoft.com/office/drawing/2014/main" id="{B14C2221-2B8C-494D-9442-F812DF4E8794}"/>
-              </a:ext>
-              <a:ext uri="{C183D7F6-B498-43B3-948B-1728B52AA6E4}">
-                <adec:decorative xmlns:adec="http://schemas.microsoft.com/office/drawing/2017/decorative" val="1"/>
-              </a:ext>
-            </a:extLst>
-          </p:cNvPr>
-          <p:cNvSpPr>
-            <a:spLocks noGrp="1" noRot="1" noChangeAspect="1" noMove="1" noResize="1" noEditPoints="1" noAdjustHandles="1" noChangeArrowheads="1" noChangeShapeType="1" noTextEdit="1"/>
-          </p:cNvSpPr>
-          <p:nvPr>
-            <p:extLst>
-              <p:ext uri="{386F3935-93C4-4BCD-93E2-E3B085C9AB24}">
-                <p16:designElem xmlns:p16="http://schemas.microsoft.com/office/powerpoint/2015/main" val="1"/>
-              </p:ext>
-            </p:extLst>
-          </p:nvPr>
-        </p:nvSpPr>
-        <p:spPr>
-          <a:xfrm>
-            <a:off x="0" y="-1"/>
-            <a:ext cx="12188952" cy="6858000"/>
-          </a:xfrm>
-          <a:prstGeom prst="rect">
-            <a:avLst/>
-          </a:prstGeom>
-          <a:ln>
-            <a:noFill/>
-          </a:ln>
-        </p:spPr>
-        <p:style>
-          <a:lnRef idx="2">
-            <a:schemeClr val="accent1">
-              <a:shade val="50000"/>
-            </a:schemeClr>
-          </a:lnRef>
-          <a:fillRef idx="1">
-            <a:schemeClr val="accent1"/>
-          </a:fillRef>
-          <a:effectRef idx="0">
-            <a:schemeClr val="accent1"/>
-          </a:effectRef>
-          <a:fontRef idx="minor">
-            <a:schemeClr val="lt1"/>
-          </a:fontRef>
-        </p:style>
-        <p:txBody>
-          <a:bodyPr rtlCol="0" anchor="ctr"/>
-          <a:lstStyle/>
-          <a:p>
-            <a:pPr algn="ctr"/>
-            <a:endParaRPr lang="en-US"/>
-          </a:p>
-        </p:txBody>
-      </p:sp>
-      <p:sp>
-        <p:nvSpPr>
-          <p:cNvPr id="2" name="Title 1">
-            <a:extLst>
-              <a:ext uri="{FF2B5EF4-FFF2-40B4-BE49-F238E27FC236}">
-                <a16:creationId xmlns:a16="http://schemas.microsoft.com/office/drawing/2014/main" id="{B350C838-419D-A320-939B-B830BDB03E4B}"/>
-              </a:ext>
-            </a:extLst>
-          </p:cNvPr>
-          <p:cNvSpPr>
-            <a:spLocks noGrp="1"/>
-          </p:cNvSpPr>
-          <p:nvPr>
-            <p:ph type="title"/>
-          </p:nvPr>
-        </p:nvSpPr>
-        <p:spPr>
-          <a:xfrm>
-            <a:off x="0" y="3513932"/>
-            <a:ext cx="3143250" cy="2601119"/>
-          </a:xfrm>
-        </p:spPr>
-        <p:txBody>
-          <a:bodyPr anchor="t">
-            <a:normAutofit/>
-          </a:bodyPr>
-          <a:lstStyle/>
-          <a:p>
-            <a:pPr algn="ctr"/>
-            <a:r>
-              <a:rPr lang="en-US" sz="3200" dirty="0"/>
-              <a:t>Features of Distributions</a:t>
-            </a:r>
-          </a:p>
-        </p:txBody>
-      </p:sp>
-      <p:pic>
-        <p:nvPicPr>
-          <p:cNvPr id="7" name="Graphic 6" descr="Bar chart">
-            <a:extLst>
-              <a:ext uri="{FF2B5EF4-FFF2-40B4-BE49-F238E27FC236}">
-                <a16:creationId xmlns:a16="http://schemas.microsoft.com/office/drawing/2014/main" id="{A24949B9-7196-14B2-6760-43F0BB29FDAA}"/>
-              </a:ext>
-            </a:extLst>
-          </p:cNvPr>
-          <p:cNvPicPr>
-            <a:picLocks noChangeAspect="1"/>
-          </p:cNvPicPr>
-          <p:nvPr/>
-        </p:nvPicPr>
-        <p:blipFill>
-          <a:blip>
-            <a:extLst>
-              <a:ext uri="{28A0092B-C50C-407E-A947-70E740481C1C}">
-                <a14:useLocalDpi xmlns:a14="http://schemas.microsoft.com/office/drawing/2010/main" val="0"/>
-              </a:ext>
-              <a:ext uri="{96DAC541-7B7A-43D3-8B79-37D633B846F1}">
-                <asvg:svgBlip xmlns:asvg="http://schemas.microsoft.com/office/drawing/2016/SVG/main" r:embed="rId2"/>
-              </a:ext>
-            </a:extLst>
-          </a:blip>
-          <a:stretch>
-            <a:fillRect/>
-          </a:stretch>
-        </p:blipFill>
-        <p:spPr>
-          <a:xfrm>
-            <a:off x="1185926" y="2429668"/>
-            <a:ext cx="914400" cy="914400"/>
-          </a:xfrm>
-          <a:prstGeom prst="rect">
-            <a:avLst/>
-          </a:prstGeom>
-        </p:spPr>
-      </p:pic>
-      <p:sp>
-        <p:nvSpPr>
-          <p:cNvPr id="3" name="Content Placeholder 2">
-            <a:extLst>
-              <a:ext uri="{FF2B5EF4-FFF2-40B4-BE49-F238E27FC236}">
-                <a16:creationId xmlns:a16="http://schemas.microsoft.com/office/drawing/2014/main" id="{1BE77A37-4E8C-D029-B59B-07E4F0EE31A8}"/>
-              </a:ext>
-            </a:extLst>
-          </p:cNvPr>
-          <p:cNvSpPr>
-            <a:spLocks noGrp="1"/>
-          </p:cNvSpPr>
-          <p:nvPr>
-            <p:ph idx="1"/>
-          </p:nvPr>
-        </p:nvSpPr>
-        <p:spPr>
-          <a:xfrm>
-            <a:off x="3048000" y="730249"/>
-            <a:ext cx="8305799" cy="5803901"/>
-          </a:xfrm>
-        </p:spPr>
-        <p:txBody>
-          <a:bodyPr anchor="ctr">
-            <a:normAutofit lnSpcReduction="10000"/>
-          </a:bodyPr>
-          <a:lstStyle/>
-          <a:p>
-            <a:r>
-              <a:rPr lang="en-US" sz="2000" dirty="0"/>
-              <a:t>A </a:t>
-            </a:r>
-            <a:r>
-              <a:rPr lang="en-US" sz="2000" b="1" dirty="0"/>
-              <a:t>distribution</a:t>
-            </a:r>
-            <a:r>
-              <a:rPr lang="en-US" sz="2000" dirty="0"/>
-              <a:t> of a variable gives (a) the values that occur and (b) how often each value occurs</a:t>
-            </a:r>
-          </a:p>
-          <a:p>
-            <a:pPr marL="0" indent="0">
-              <a:buNone/>
-            </a:pPr>
-            <a:endParaRPr lang="en-US" sz="2000" dirty="0"/>
-          </a:p>
-          <a:p>
-            <a:pPr marL="0" indent="0">
-              <a:buNone/>
-            </a:pPr>
-            <a:r>
-              <a:rPr lang="en-US" sz="2000" b="1" u="sng" dirty="0"/>
-              <a:t>Features of A Distribution</a:t>
-            </a:r>
-          </a:p>
-          <a:p>
-            <a:pPr marL="0" indent="0">
-              <a:buNone/>
-            </a:pPr>
-            <a:r>
-              <a:rPr lang="en-US" sz="2000" b="1" dirty="0"/>
-              <a:t>Categorical Variables:</a:t>
-            </a:r>
-          </a:p>
-          <a:p>
-            <a:r>
-              <a:rPr lang="en-US" sz="2000" b="1" dirty="0"/>
-              <a:t>Modal category </a:t>
-            </a:r>
-            <a:r>
-              <a:rPr lang="en-US" sz="2000" dirty="0"/>
-              <a:t>– the category with the highest frequency</a:t>
-            </a:r>
-          </a:p>
-          <a:p>
-            <a:pPr marL="0" indent="0">
-              <a:buNone/>
-            </a:pPr>
-            <a:endParaRPr lang="en-US" sz="2000" b="1" dirty="0"/>
-          </a:p>
-          <a:p>
-            <a:pPr marL="0" indent="0">
-              <a:buNone/>
-            </a:pPr>
-            <a:r>
-              <a:rPr lang="en-US" sz="2000" b="1" dirty="0"/>
-              <a:t>Quantitative Variables:</a:t>
-            </a:r>
-          </a:p>
-          <a:p>
-            <a:r>
-              <a:rPr lang="en-US" sz="2000" b="1" dirty="0"/>
-              <a:t>Shape</a:t>
-            </a:r>
-            <a:r>
-              <a:rPr lang="en-US" sz="2000" dirty="0"/>
-              <a:t> – do observations cluster into certain areas, are values spread out or more densely packed together?</a:t>
-            </a:r>
-          </a:p>
-          <a:p>
-            <a:endParaRPr lang="en-US" sz="2000" b="1" dirty="0"/>
-          </a:p>
-          <a:p>
-            <a:r>
-              <a:rPr lang="en-US" sz="2000" b="1" dirty="0"/>
-              <a:t>Center</a:t>
-            </a:r>
-            <a:r>
-              <a:rPr lang="en-US" sz="2000" dirty="0"/>
-              <a:t> – where is the middle point on the distribution, where does a typical value fall?</a:t>
-            </a:r>
-            <a:endParaRPr lang="en-US" sz="2000" b="1" dirty="0"/>
-          </a:p>
-          <a:p>
-            <a:endParaRPr lang="en-US" sz="2000" b="1" dirty="0"/>
-          </a:p>
-          <a:p>
-            <a:r>
-              <a:rPr lang="en-US" sz="2000" b="1" dirty="0"/>
-              <a:t>Variability</a:t>
-            </a:r>
-            <a:r>
-              <a:rPr lang="en-US" sz="2000" dirty="0"/>
-              <a:t> – how tightly to observations cluster around the center of the distribution </a:t>
-            </a:r>
-          </a:p>
-        </p:txBody>
-      </p:sp>
-    </p:spTree>
-    <p:extLst>
-      <p:ext uri="{BB962C8B-B14F-4D97-AF65-F5344CB8AC3E}">
-        <p14:creationId xmlns:p14="http://schemas.microsoft.com/office/powerpoint/2010/main" val="109664182"/>
-      </p:ext>
-    </p:extLst>
-  </p:cSld>
-  <p:clrMapOvr>
-    <a:masterClrMapping/>
-  </p:clrMapOvr>
-</p:sld>
-</file>
-
-<file path=ppt/slides/slide21.xml><?xml version="1.0" encoding="utf-8"?>
-<p:sld xmlns:a="http://schemas.openxmlformats.org/drawingml/2006/main" xmlns:r="http://schemas.openxmlformats.org/officeDocument/2006/relationships" xmlns:p="http://schemas.openxmlformats.org/presentationml/2006/main">
-  <p:cSld>
-    <p:spTree>
-      <p:nvGrpSpPr>
-        <p:cNvPr id="1" name=""/>
-        <p:cNvGrpSpPr/>
-        <p:nvPr/>
-      </p:nvGrpSpPr>
-      <p:grpSpPr>
-        <a:xfrm>
-          <a:off x="0" y="0"/>
-          <a:ext cx="0" cy="0"/>
-          <a:chOff x="0" y="0"/>
-          <a:chExt cx="0" cy="0"/>
-        </a:xfrm>
-      </p:grpSpPr>
-      <p:sp>
-        <p:nvSpPr>
-          <p:cNvPr id="2" name="Title 1">
-            <a:extLst>
-              <a:ext uri="{FF2B5EF4-FFF2-40B4-BE49-F238E27FC236}">
-                <a16:creationId xmlns:a16="http://schemas.microsoft.com/office/drawing/2014/main" id="{746E7931-7E6D-2752-3470-1130A2671C60}"/>
-              </a:ext>
-            </a:extLst>
-          </p:cNvPr>
-          <p:cNvSpPr>
-            <a:spLocks noGrp="1"/>
-          </p:cNvSpPr>
-          <p:nvPr>
-            <p:ph type="title"/>
-          </p:nvPr>
-        </p:nvSpPr>
-        <p:spPr/>
-        <p:txBody>
-          <a:bodyPr/>
-          <a:lstStyle/>
-          <a:p>
-            <a:r>
-              <a:rPr lang="en-US" dirty="0"/>
-              <a:t>Displaying Distributions: Frequency Tables</a:t>
-            </a:r>
-          </a:p>
-        </p:txBody>
-      </p:sp>
-      <mc:AlternateContent xmlns:mc="http://schemas.openxmlformats.org/markup-compatibility/2006" xmlns:a14="http://schemas.microsoft.com/office/drawing/2010/main">
-        <mc:Choice Requires="a14">
-          <p:sp>
-            <p:nvSpPr>
-              <p:cNvPr id="3" name="Content Placeholder 2">
-                <a:extLst>
-                  <a:ext uri="{FF2B5EF4-FFF2-40B4-BE49-F238E27FC236}">
-                    <a16:creationId xmlns:a16="http://schemas.microsoft.com/office/drawing/2014/main" id="{F62BC55B-314A-1FBB-D20E-C5A204950191}"/>
-                  </a:ext>
-                </a:extLst>
-              </p:cNvPr>
-              <p:cNvSpPr>
-                <a:spLocks noGrp="1"/>
-              </p:cNvSpPr>
-              <p:nvPr>
-                <p:ph idx="1"/>
-              </p:nvPr>
-            </p:nvSpPr>
-            <p:spPr>
-              <a:xfrm>
-                <a:off x="838200" y="1825625"/>
-                <a:ext cx="4686300" cy="4351338"/>
-              </a:xfrm>
-            </p:spPr>
-            <p:txBody>
-              <a:bodyPr>
-                <a:normAutofit fontScale="70000" lnSpcReduction="20000"/>
-              </a:bodyPr>
-              <a:lstStyle/>
-              <a:p>
-                <a:r>
-                  <a:rPr lang="en-US" b="1" dirty="0"/>
-                  <a:t>Frequency table – </a:t>
-                </a:r>
-                <a:r>
-                  <a:rPr lang="en-US" dirty="0"/>
-                  <a:t>a table listing the distinct values of variable together with the number of observations of each value</a:t>
-                </a:r>
-              </a:p>
-              <a:p>
-                <a:endParaRPr lang="en-US" b="1" dirty="0"/>
-              </a:p>
-              <a:p>
-                <a:r>
-                  <a:rPr lang="en-US" b="1" dirty="0"/>
-                  <a:t>Frequency</a:t>
-                </a:r>
-                <a:r>
-                  <a:rPr lang="en-US" dirty="0"/>
-                  <a:t> – the number of times a value occurs</a:t>
-                </a:r>
-              </a:p>
-              <a:p>
-                <a:endParaRPr lang="en-US" dirty="0"/>
-              </a:p>
-              <a:p>
-                <a:r>
-                  <a:rPr lang="en-US" b="1" dirty="0"/>
-                  <a:t>Relative Frequency</a:t>
-                </a:r>
-                <a:r>
-                  <a:rPr lang="en-US" dirty="0"/>
-                  <a:t> – the proportion of observations that assume a given value</a:t>
-                </a:r>
-              </a:p>
-              <a:p>
-                <a:pPr marL="0" indent="0">
-                  <a:buNone/>
-                </a:pPr>
-                <a:r>
-                  <a:rPr lang="en-US" dirty="0"/>
-                  <a:t>	</a:t>
-                </a:r>
-                <a14:m>
-                  <m:oMath xmlns:m="http://schemas.openxmlformats.org/officeDocument/2006/math">
-                    <m:r>
-                      <m:rPr>
-                        <m:sty m:val="p"/>
-                      </m:rPr>
-                      <a:rPr lang="en-US" sz="3400" b="0" i="0" smtClean="0">
-                        <a:latin typeface="Cambria Math" panose="02040503050406030204" pitchFamily="18" charset="0"/>
-                      </a:rPr>
-                      <m:t>RF</m:t>
-                    </m:r>
-                    <m:r>
-                      <a:rPr lang="en-US" sz="3400" b="0" i="0" smtClean="0">
-                        <a:latin typeface="Cambria Math" panose="02040503050406030204" pitchFamily="18" charset="0"/>
-                      </a:rPr>
-                      <m:t>= </m:t>
-                    </m:r>
-                    <m:f>
-                      <m:fPr>
-                        <m:ctrlPr>
-                          <a:rPr lang="en-US" sz="3400" b="0" i="1" smtClean="0">
-                            <a:latin typeface="Cambria Math" panose="02040503050406030204" pitchFamily="18" charset="0"/>
-                          </a:rPr>
-                        </m:ctrlPr>
-                      </m:fPr>
-                      <m:num>
-                        <m:r>
-                          <a:rPr lang="en-US" sz="3400" b="0" i="1" smtClean="0">
-                            <a:latin typeface="Cambria Math" panose="02040503050406030204" pitchFamily="18" charset="0"/>
-                          </a:rPr>
-                          <m:t>𝑓</m:t>
-                        </m:r>
-                      </m:num>
-                      <m:den>
-                        <m:r>
-                          <a:rPr lang="en-US" sz="3400" b="0" i="1" smtClean="0">
-                            <a:latin typeface="Cambria Math" panose="02040503050406030204" pitchFamily="18" charset="0"/>
-                          </a:rPr>
-                          <m:t>𝑛</m:t>
-                        </m:r>
-                      </m:den>
-                    </m:f>
-                    <m:r>
-                      <a:rPr lang="en-US" sz="3400" b="0" i="1" smtClean="0">
-                        <a:latin typeface="Cambria Math" panose="02040503050406030204" pitchFamily="18" charset="0"/>
-                      </a:rPr>
-                      <m:t>,</m:t>
-                    </m:r>
-                  </m:oMath>
-                </a14:m>
-                <a:endParaRPr lang="en-US" dirty="0"/>
-              </a:p>
-              <a:p>
-                <a:r>
-                  <a:rPr lang="en-US" b="1" dirty="0"/>
-                  <a:t>Cumulative Relative Frequency </a:t>
-                </a:r>
-                <a:r>
-                  <a:rPr lang="en-US" dirty="0"/>
-                  <a:t>- the proportion of observations </a:t>
-                </a:r>
-                <a:r>
-                  <a:rPr lang="en-US" u="sng" dirty="0"/>
-                  <a:t>equal to or less than</a:t>
-                </a:r>
-                <a:r>
-                  <a:rPr lang="en-US" dirty="0"/>
-                  <a:t> a given value (more on this later)</a:t>
-                </a:r>
-              </a:p>
-            </p:txBody>
-          </p:sp>
-        </mc:Choice>
-        <mc:Fallback xmlns="">
-          <p:sp>
-            <p:nvSpPr>
-              <p:cNvPr id="3" name="Content Placeholder 2">
-                <a:extLst>
-                  <a:ext uri="{FF2B5EF4-FFF2-40B4-BE49-F238E27FC236}">
-                    <a16:creationId xmlns:a16="http://schemas.microsoft.com/office/drawing/2014/main" id="{F62BC55B-314A-1FBB-D20E-C5A204950191}"/>
-                  </a:ext>
-                </a:extLst>
-              </p:cNvPr>
-              <p:cNvSpPr>
-                <a:spLocks noGrp="1" noRot="1" noChangeAspect="1" noMove="1" noResize="1" noEditPoints="1" noAdjustHandles="1" noChangeArrowheads="1" noChangeShapeType="1" noTextEdit="1"/>
-              </p:cNvSpPr>
-              <p:nvPr>
-                <p:ph idx="1"/>
-              </p:nvPr>
-            </p:nvSpPr>
-            <p:spPr>
-              <a:xfrm>
-                <a:off x="838200" y="1825625"/>
-                <a:ext cx="4686300" cy="4351338"/>
-              </a:xfrm>
-              <a:blipFill>
-                <a:blip r:embed="rId2"/>
-                <a:stretch>
-                  <a:fillRect l="-1172" t="-2521" r="-2083"/>
-                </a:stretch>
-              </a:blipFill>
-            </p:spPr>
-            <p:txBody>
-              <a:bodyPr/>
-              <a:lstStyle/>
-              <a:p>
-                <a:r>
-                  <a:rPr lang="en-US">
-                    <a:noFill/>
-                  </a:rPr>
-                  <a:t> </a:t>
-                </a:r>
-              </a:p>
-            </p:txBody>
-          </p:sp>
-        </mc:Fallback>
-      </mc:AlternateContent>
-      <p:sp>
-        <p:nvSpPr>
-          <p:cNvPr id="5" name="TextBox 4">
-            <a:extLst>
-              <a:ext uri="{FF2B5EF4-FFF2-40B4-BE49-F238E27FC236}">
-                <a16:creationId xmlns:a16="http://schemas.microsoft.com/office/drawing/2014/main" id="{C16CEE11-2CF1-DEAD-BC8D-9BB706DE1AB6}"/>
-              </a:ext>
-            </a:extLst>
-          </p:cNvPr>
-          <p:cNvSpPr txBox="1"/>
-          <p:nvPr/>
-        </p:nvSpPr>
-        <p:spPr>
-          <a:xfrm>
-            <a:off x="6873497" y="1506022"/>
-            <a:ext cx="4392100" cy="369332"/>
-          </a:xfrm>
-          <a:prstGeom prst="rect">
-            <a:avLst/>
-          </a:prstGeom>
-          <a:noFill/>
-        </p:spPr>
-        <p:txBody>
-          <a:bodyPr wrap="none" rtlCol="0">
-            <a:spAutoFit/>
-          </a:bodyPr>
-          <a:lstStyle/>
-          <a:p>
-            <a:r>
-              <a:rPr lang="en-US" dirty="0"/>
-              <a:t>Ex. Are teens distracted by their cell phones?</a:t>
-            </a:r>
-          </a:p>
-        </p:txBody>
-      </p:sp>
-      <p:sp>
-        <p:nvSpPr>
-          <p:cNvPr id="6" name="TextBox 5">
-            <a:extLst>
-              <a:ext uri="{FF2B5EF4-FFF2-40B4-BE49-F238E27FC236}">
-                <a16:creationId xmlns:a16="http://schemas.microsoft.com/office/drawing/2014/main" id="{7CCE2FF9-7536-5C89-D055-D6807D532711}"/>
-              </a:ext>
-            </a:extLst>
-          </p:cNvPr>
-          <p:cNvSpPr txBox="1"/>
-          <p:nvPr/>
-        </p:nvSpPr>
-        <p:spPr>
-          <a:xfrm>
-            <a:off x="6455303" y="4492364"/>
-            <a:ext cx="5045612" cy="523220"/>
-          </a:xfrm>
-          <a:prstGeom prst="rect">
-            <a:avLst/>
-          </a:prstGeom>
-          <a:noFill/>
-        </p:spPr>
-        <p:txBody>
-          <a:bodyPr wrap="square" rtlCol="0">
-            <a:spAutoFit/>
-          </a:bodyPr>
-          <a:lstStyle/>
-          <a:p>
-            <a:r>
-              <a:rPr lang="en-US" sz="1400" dirty="0"/>
-              <a:t>Ex. </a:t>
-            </a:r>
-            <a:r>
-              <a:rPr lang="en-US" sz="1400" dirty="0" err="1"/>
-              <a:t>Mendels</a:t>
-            </a:r>
-            <a:r>
-              <a:rPr lang="en-US" sz="1400" dirty="0"/>
-              <a:t> Pea Plants - In one of Gregor Mendel’s classic studies, </a:t>
-            </a:r>
-          </a:p>
-          <a:p>
-            <a:r>
-              <a:rPr lang="en-US" sz="1400" dirty="0"/>
-              <a:t>he bred 8023 pea plants and observed the color of the pea pods. </a:t>
-            </a:r>
-          </a:p>
-        </p:txBody>
-      </p:sp>
-      <p:pic>
-        <p:nvPicPr>
-          <p:cNvPr id="7" name="Picture 6">
-            <a:extLst>
-              <a:ext uri="{FF2B5EF4-FFF2-40B4-BE49-F238E27FC236}">
-                <a16:creationId xmlns:a16="http://schemas.microsoft.com/office/drawing/2014/main" id="{7747518D-2983-9589-ADFC-D914C94612B9}"/>
-              </a:ext>
-            </a:extLst>
-          </p:cNvPr>
-          <p:cNvPicPr>
-            <a:picLocks noChangeAspect="1"/>
-          </p:cNvPicPr>
-          <p:nvPr/>
-        </p:nvPicPr>
-        <p:blipFill>
-          <a:blip r:embed="rId3"/>
-          <a:stretch>
-            <a:fillRect/>
-          </a:stretch>
-        </p:blipFill>
-        <p:spPr>
-          <a:xfrm>
-            <a:off x="6873497" y="5015584"/>
-            <a:ext cx="4359220" cy="1477291"/>
-          </a:xfrm>
-          <a:prstGeom prst="rect">
-            <a:avLst/>
-          </a:prstGeom>
-        </p:spPr>
-      </p:pic>
-      <p:pic>
-        <p:nvPicPr>
-          <p:cNvPr id="9" name="Picture 8">
-            <a:extLst>
-              <a:ext uri="{FF2B5EF4-FFF2-40B4-BE49-F238E27FC236}">
-                <a16:creationId xmlns:a16="http://schemas.microsoft.com/office/drawing/2014/main" id="{A726F141-28A4-5B62-1A80-B214989D15D2}"/>
-              </a:ext>
-            </a:extLst>
-          </p:cNvPr>
-          <p:cNvPicPr>
-            <a:picLocks noChangeAspect="1"/>
-          </p:cNvPicPr>
-          <p:nvPr/>
-        </p:nvPicPr>
-        <p:blipFill>
-          <a:blip r:embed="rId4"/>
-          <a:stretch>
-            <a:fillRect/>
-          </a:stretch>
-        </p:blipFill>
-        <p:spPr>
-          <a:xfrm>
-            <a:off x="5661891" y="1887427"/>
-            <a:ext cx="6358151" cy="2477747"/>
-          </a:xfrm>
-          <a:prstGeom prst="rect">
-            <a:avLst/>
-          </a:prstGeom>
-        </p:spPr>
-      </p:pic>
-    </p:spTree>
-    <p:extLst>
-      <p:ext uri="{BB962C8B-B14F-4D97-AF65-F5344CB8AC3E}">
-        <p14:creationId xmlns:p14="http://schemas.microsoft.com/office/powerpoint/2010/main" val="3307213172"/>
-      </p:ext>
-    </p:extLst>
-  </p:cSld>
-  <p:clrMapOvr>
-    <a:masterClrMapping/>
-  </p:clrMapOvr>
 </p:sld>
 </file>
 
